--- a/Library/CMSIS/Compiler/documentation/doxygen/src/images/blocks.pptx
+++ b/Library/CMSIS/Compiler/documentation/doxygen/src/images/blocks.pptx
@@ -273,7 +273,7 @@
           <a:p>
             <a:fld id="{E1BCA6AF-7F69-456D-BB79-EC94A44BF887}" type="datetimeFigureOut">
               <a:rPr lang="en-US" smtClean="0"/>
-              <a:t>11/10/2023</a:t>
+              <a:t>1/26/2026</a:t>
             </a:fld>
             <a:endParaRPr lang="en-US"/>
           </a:p>
@@ -471,7 +471,7 @@
           <a:p>
             <a:fld id="{E1BCA6AF-7F69-456D-BB79-EC94A44BF887}" type="datetimeFigureOut">
               <a:rPr lang="en-US" smtClean="0"/>
-              <a:t>11/10/2023</a:t>
+              <a:t>1/26/2026</a:t>
             </a:fld>
             <a:endParaRPr lang="en-US"/>
           </a:p>
@@ -679,7 +679,7 @@
           <a:p>
             <a:fld id="{E1BCA6AF-7F69-456D-BB79-EC94A44BF887}" type="datetimeFigureOut">
               <a:rPr lang="en-US" smtClean="0"/>
-              <a:t>11/10/2023</a:t>
+              <a:t>1/26/2026</a:t>
             </a:fld>
             <a:endParaRPr lang="en-US"/>
           </a:p>
@@ -877,7 +877,7 @@
           <a:p>
             <a:fld id="{E1BCA6AF-7F69-456D-BB79-EC94A44BF887}" type="datetimeFigureOut">
               <a:rPr lang="en-US" smtClean="0"/>
-              <a:t>11/10/2023</a:t>
+              <a:t>1/26/2026</a:t>
             </a:fld>
             <a:endParaRPr lang="en-US"/>
           </a:p>
@@ -1152,7 +1152,7 @@
           <a:p>
             <a:fld id="{E1BCA6AF-7F69-456D-BB79-EC94A44BF887}" type="datetimeFigureOut">
               <a:rPr lang="en-US" smtClean="0"/>
-              <a:t>11/10/2023</a:t>
+              <a:t>1/26/2026</a:t>
             </a:fld>
             <a:endParaRPr lang="en-US"/>
           </a:p>
@@ -1417,7 +1417,7 @@
           <a:p>
             <a:fld id="{E1BCA6AF-7F69-456D-BB79-EC94A44BF887}" type="datetimeFigureOut">
               <a:rPr lang="en-US" smtClean="0"/>
-              <a:t>11/10/2023</a:t>
+              <a:t>1/26/2026</a:t>
             </a:fld>
             <a:endParaRPr lang="en-US"/>
           </a:p>
@@ -1829,7 +1829,7 @@
           <a:p>
             <a:fld id="{E1BCA6AF-7F69-456D-BB79-EC94A44BF887}" type="datetimeFigureOut">
               <a:rPr lang="en-US" smtClean="0"/>
-              <a:t>11/10/2023</a:t>
+              <a:t>1/26/2026</a:t>
             </a:fld>
             <a:endParaRPr lang="en-US"/>
           </a:p>
@@ -1970,7 +1970,7 @@
           <a:p>
             <a:fld id="{E1BCA6AF-7F69-456D-BB79-EC94A44BF887}" type="datetimeFigureOut">
               <a:rPr lang="en-US" smtClean="0"/>
-              <a:t>11/10/2023</a:t>
+              <a:t>1/26/2026</a:t>
             </a:fld>
             <a:endParaRPr lang="en-US"/>
           </a:p>
@@ -2083,7 +2083,7 @@
           <a:p>
             <a:fld id="{E1BCA6AF-7F69-456D-BB79-EC94A44BF887}" type="datetimeFigureOut">
               <a:rPr lang="en-US" smtClean="0"/>
-              <a:t>11/10/2023</a:t>
+              <a:t>1/26/2026</a:t>
             </a:fld>
             <a:endParaRPr lang="en-US"/>
           </a:p>
@@ -2394,7 +2394,7 @@
           <a:p>
             <a:fld id="{E1BCA6AF-7F69-456D-BB79-EC94A44BF887}" type="datetimeFigureOut">
               <a:rPr lang="en-US" smtClean="0"/>
-              <a:t>11/10/2023</a:t>
+              <a:t>1/26/2026</a:t>
             </a:fld>
             <a:endParaRPr lang="en-US"/>
           </a:p>
@@ -2682,7 +2682,7 @@
           <a:p>
             <a:fld id="{E1BCA6AF-7F69-456D-BB79-EC94A44BF887}" type="datetimeFigureOut">
               <a:rPr lang="en-US" smtClean="0"/>
-              <a:t>11/10/2023</a:t>
+              <a:t>1/26/2026</a:t>
             </a:fld>
             <a:endParaRPr lang="en-US"/>
           </a:p>
@@ -2923,7 +2923,7 @@
           <a:p>
             <a:fld id="{E1BCA6AF-7F69-456D-BB79-EC94A44BF887}" type="datetimeFigureOut">
               <a:rPr lang="en-US" smtClean="0"/>
-              <a:t>11/10/2023</a:t>
+              <a:t>1/26/2026</a:t>
             </a:fld>
             <a:endParaRPr lang="en-US"/>
           </a:p>
@@ -5790,7 +5790,7 @@
         <p:spPr>
           <a:xfrm>
             <a:off x="363274" y="288277"/>
-            <a:ext cx="2945983" cy="3613163"/>
+            <a:ext cx="2945983" cy="4096687"/>
           </a:xfrm>
           <a:prstGeom prst="rect">
             <a:avLst/>
@@ -5992,7 +5992,7 @@
         <p:spPr>
           <a:xfrm>
             <a:off x="1004146" y="1491972"/>
-            <a:ext cx="1996554" cy="2206255"/>
+            <a:ext cx="1996554" cy="2699028"/>
           </a:xfrm>
           <a:prstGeom prst="rect">
             <a:avLst/>
@@ -6252,7 +6252,7 @@
               <a:rPr lang="en-US" sz="1200" dirty="0">
                 <a:latin typeface="Consolas" panose="020B0609020204030204" pitchFamily="49" charset="0"/>
               </a:rPr>
-              <a:t>Custom</a:t>
+              <a:t>UART</a:t>
             </a:r>
           </a:p>
         </p:txBody>
@@ -6581,6 +6581,63 @@
         <p:spPr>
           <a:xfrm>
             <a:off x="5875559" y="2171204"/>
+            <a:ext cx="1615439" cy="364464"/>
+          </a:xfrm>
+          <a:prstGeom prst="rect">
+            <a:avLst/>
+          </a:prstGeom>
+          <a:solidFill>
+            <a:schemeClr val="tx2"/>
+          </a:solidFill>
+          <a:ln>
+            <a:noFill/>
+          </a:ln>
+        </p:spPr>
+        <p:style>
+          <a:lnRef idx="2">
+            <a:schemeClr val="accent1">
+              <a:shade val="50000"/>
+            </a:schemeClr>
+          </a:lnRef>
+          <a:fillRef idx="1">
+            <a:schemeClr val="accent1"/>
+          </a:fillRef>
+          <a:effectRef idx="0">
+            <a:schemeClr val="accent1"/>
+          </a:effectRef>
+          <a:fontRef idx="minor">
+            <a:schemeClr val="lt1"/>
+          </a:fontRef>
+        </p:style>
+        <p:txBody>
+          <a:bodyPr rtlCol="0" anchor="ctr"/>
+          <a:lstStyle/>
+          <a:p>
+            <a:pPr algn="ctr"/>
+            <a:r>
+              <a:rPr lang="en-US" sz="1200" dirty="0">
+                <a:latin typeface="Consolas" panose="020B0609020204030204" pitchFamily="49" charset="0"/>
+              </a:rPr>
+              <a:t>Custom</a:t>
+            </a:r>
+          </a:p>
+        </p:txBody>
+      </p:sp>
+      <p:sp>
+        <p:nvSpPr>
+          <p:cNvPr id="6" name="Rectangle 5">
+            <a:extLst>
+              <a:ext uri="{FF2B5EF4-FFF2-40B4-BE49-F238E27FC236}">
+                <a16:creationId xmlns:a16="http://schemas.microsoft.com/office/drawing/2014/main" id="{F79AA737-33E0-0133-602E-E04576E87A5D}"/>
+              </a:ext>
+            </a:extLst>
+          </p:cNvPr>
+          <p:cNvSpPr/>
+          <p:nvPr/>
+        </p:nvSpPr>
+        <p:spPr>
+          <a:xfrm>
+            <a:off x="1194700" y="3645899"/>
             <a:ext cx="1615439" cy="364464"/>
           </a:xfrm>
           <a:prstGeom prst="rect">
